--- a/Docs/Project_439_submission.pptx
+++ b/Docs/Project_439_submission.pptx
@@ -25350,14 +25350,14 @@
           <p:nvPr>
             <p:extLst>
               <p:ext uri="{D42A27DB-BD31-4B8C-83A1-F6EECF244321}">
-                <p14:modId xmlns:p14="http://schemas.microsoft.com/office/powerpoint/2010/main" val="479698452"/>
+                <p14:modId xmlns:p14="http://schemas.microsoft.com/office/powerpoint/2010/main" val="2673873139"/>
               </p:ext>
             </p:extLst>
           </p:nvPr>
         </p:nvGraphicFramePr>
         <p:xfrm>
-          <a:off x="5520047" y="3675595"/>
-          <a:ext cx="3279775" cy="1499838"/>
+          <a:off x="5520047" y="3770308"/>
+          <a:ext cx="3279775" cy="1426612"/>
         </p:xfrm>
         <a:graphic>
           <a:graphicData uri="http://schemas.openxmlformats.org/drawingml/2006/table">
@@ -25381,7 +25381,7 @@
                   </a:extLst>
                 </a:gridCol>
               </a:tblGrid>
-              <a:tr h="499946">
+              <a:tr h="408213">
                 <a:tc>
                   <a:txBody>
                     <a:bodyPr/>
@@ -25557,6 +25557,231 @@
             <a:r>
               <a:rPr lang="en-US" dirty="0"/>
               <a:t>Vendors</a:t>
+            </a:r>
+          </a:p>
+        </p:txBody>
+      </p:sp>
+      <p:sp>
+        <p:nvSpPr>
+          <p:cNvPr id="33" name="Rectangle 32">
+            <a:extLst>
+              <a:ext uri="{FF2B5EF4-FFF2-40B4-BE49-F238E27FC236}">
+                <a16:creationId xmlns:a16="http://schemas.microsoft.com/office/drawing/2014/main" id="{EB6DEFFA-48AC-4949-A0CD-F5CA2C409218}"/>
+              </a:ext>
+            </a:extLst>
+          </p:cNvPr>
+          <p:cNvSpPr/>
+          <p:nvPr/>
+        </p:nvSpPr>
+        <p:spPr>
+          <a:xfrm>
+            <a:off x="10160000" y="2159000"/>
+            <a:ext cx="38100" cy="2324100"/>
+          </a:xfrm>
+          <a:prstGeom prst="rect">
+            <a:avLst/>
+          </a:prstGeom>
+          <a:solidFill>
+            <a:srgbClr val="C00000"/>
+          </a:solidFill>
+          <a:ln w="12700" cap="flat" cmpd="sng" algn="ctr">
+            <a:noFill/>
+            <a:prstDash val="solid"/>
+            <a:miter lim="800000"/>
+          </a:ln>
+        </p:spPr>
+        <p:style>
+          <a:lnRef idx="2">
+            <a:schemeClr val="accent1">
+              <a:shade val="15000"/>
+            </a:schemeClr>
+          </a:lnRef>
+          <a:fillRef idx="1">
+            <a:schemeClr val="accent1"/>
+          </a:fillRef>
+          <a:effectRef idx="0">
+            <a:schemeClr val="accent1"/>
+          </a:effectRef>
+          <a:fontRef idx="minor">
+            <a:schemeClr val="lt1"/>
+          </a:fontRef>
+        </p:style>
+        <p:txBody>
+          <a:bodyPr vertOverflow="clip" horzOverflow="clip" rtlCol="0" anchor="t"/>
+          <a:lstStyle/>
+          <a:p>
+            <a:pPr algn="l"/>
+            <a:endParaRPr lang="en-US"/>
+          </a:p>
+        </p:txBody>
+      </p:sp>
+      <p:sp>
+        <p:nvSpPr>
+          <p:cNvPr id="34" name="Rectangle 33">
+            <a:extLst>
+              <a:ext uri="{FF2B5EF4-FFF2-40B4-BE49-F238E27FC236}">
+                <a16:creationId xmlns:a16="http://schemas.microsoft.com/office/drawing/2014/main" id="{9B88102F-9180-5844-8AC7-C59D72D601FC}"/>
+              </a:ext>
+            </a:extLst>
+          </p:cNvPr>
+          <p:cNvSpPr/>
+          <p:nvPr/>
+        </p:nvSpPr>
+        <p:spPr>
+          <a:xfrm>
+            <a:off x="9690100" y="2159000"/>
+            <a:ext cx="508000" cy="38100"/>
+          </a:xfrm>
+          <a:prstGeom prst="rect">
+            <a:avLst/>
+          </a:prstGeom>
+          <a:solidFill>
+            <a:srgbClr val="C00000"/>
+          </a:solidFill>
+          <a:ln w="12700" cap="flat" cmpd="sng" algn="ctr">
+            <a:noFill/>
+            <a:prstDash val="solid"/>
+            <a:miter lim="800000"/>
+          </a:ln>
+        </p:spPr>
+        <p:style>
+          <a:lnRef idx="2">
+            <a:schemeClr val="accent1">
+              <a:shade val="15000"/>
+            </a:schemeClr>
+          </a:lnRef>
+          <a:fillRef idx="1">
+            <a:schemeClr val="accent1"/>
+          </a:fillRef>
+          <a:effectRef idx="0">
+            <a:schemeClr val="accent1"/>
+          </a:effectRef>
+          <a:fontRef idx="minor">
+            <a:schemeClr val="lt1"/>
+          </a:fontRef>
+        </p:style>
+        <p:txBody>
+          <a:bodyPr vertOverflow="clip" horzOverflow="clip" rtlCol="0" anchor="t"/>
+          <a:lstStyle/>
+          <a:p>
+            <a:pPr algn="l"/>
+            <a:endParaRPr lang="en-US"/>
+          </a:p>
+        </p:txBody>
+      </p:sp>
+      <p:sp>
+        <p:nvSpPr>
+          <p:cNvPr id="35" name="Left Arrow 34">
+            <a:extLst>
+              <a:ext uri="{FF2B5EF4-FFF2-40B4-BE49-F238E27FC236}">
+                <a16:creationId xmlns:a16="http://schemas.microsoft.com/office/drawing/2014/main" id="{D25F7BB9-5E20-FC4F-9383-DB1E0B135388}"/>
+              </a:ext>
+            </a:extLst>
+          </p:cNvPr>
+          <p:cNvSpPr/>
+          <p:nvPr/>
+        </p:nvSpPr>
+        <p:spPr>
+          <a:xfrm>
+            <a:off x="8801100" y="4394200"/>
+            <a:ext cx="1397000" cy="177800"/>
+          </a:xfrm>
+          <a:prstGeom prst="leftArrow">
+            <a:avLst/>
+          </a:prstGeom>
+          <a:solidFill>
+            <a:srgbClr val="C00000"/>
+          </a:solidFill>
+          <a:ln w="12700" cap="flat" cmpd="sng" algn="ctr">
+            <a:noFill/>
+            <a:prstDash val="solid"/>
+            <a:miter lim="800000"/>
+          </a:ln>
+        </p:spPr>
+        <p:style>
+          <a:lnRef idx="2">
+            <a:schemeClr val="accent1">
+              <a:shade val="15000"/>
+            </a:schemeClr>
+          </a:lnRef>
+          <a:fillRef idx="1">
+            <a:schemeClr val="accent1"/>
+          </a:fillRef>
+          <a:effectRef idx="0">
+            <a:schemeClr val="accent1"/>
+          </a:effectRef>
+          <a:fontRef idx="minor">
+            <a:schemeClr val="lt1"/>
+          </a:fontRef>
+        </p:style>
+        <p:txBody>
+          <a:bodyPr vertOverflow="clip" horzOverflow="clip" rtlCol="0" anchor="t"/>
+          <a:lstStyle/>
+          <a:p>
+            <a:pPr algn="l"/>
+            <a:endParaRPr lang="en-US"/>
+          </a:p>
+        </p:txBody>
+      </p:sp>
+      <p:sp>
+        <p:nvSpPr>
+          <p:cNvPr id="36" name="Rounded Rectangle 35">
+            <a:extLst>
+              <a:ext uri="{FF2B5EF4-FFF2-40B4-BE49-F238E27FC236}">
+                <a16:creationId xmlns:a16="http://schemas.microsoft.com/office/drawing/2014/main" id="{791DA0FC-25B2-3B4E-B23E-CF481BD0C98C}"/>
+              </a:ext>
+            </a:extLst>
+          </p:cNvPr>
+          <p:cNvSpPr/>
+          <p:nvPr/>
+        </p:nvSpPr>
+        <p:spPr>
+          <a:xfrm>
+            <a:off x="9969500" y="3175000"/>
+            <a:ext cx="457200" cy="279400"/>
+          </a:xfrm>
+          <a:prstGeom prst="roundRect">
+            <a:avLst/>
+          </a:prstGeom>
+          <a:solidFill>
+            <a:srgbClr val="C00000"/>
+          </a:solidFill>
+          <a:ln w="12700" cap="flat" cmpd="sng" algn="ctr">
+            <a:noFill/>
+            <a:prstDash val="solid"/>
+            <a:miter lim="800000"/>
+          </a:ln>
+        </p:spPr>
+        <p:style>
+          <a:lnRef idx="2">
+            <a:schemeClr val="accent1">
+              <a:shade val="15000"/>
+            </a:schemeClr>
+          </a:lnRef>
+          <a:fillRef idx="1">
+            <a:schemeClr val="accent1"/>
+          </a:fillRef>
+          <a:effectRef idx="0">
+            <a:schemeClr val="accent1"/>
+          </a:effectRef>
+          <a:fontRef idx="minor">
+            <a:schemeClr val="lt1"/>
+          </a:fontRef>
+        </p:style>
+        <p:txBody>
+          <a:bodyPr vertOverflow="clip" horzOverflow="clip" wrap="none" rtlCol="0" anchor="ctr" anchorCtr="0">
+            <a:noAutofit/>
+          </a:bodyPr>
+          <a:lstStyle/>
+          <a:p>
+            <a:pPr algn="l"/>
+            <a:r>
+              <a:rPr lang="en-US" sz="1100" b="1" dirty="0">
+                <a:solidFill>
+                  <a:srgbClr val="FFFFFF"/>
+                </a:solidFill>
+              </a:rPr>
+              <a:t>FK</a:t>
             </a:r>
           </a:p>
         </p:txBody>
@@ -28623,4 +28848,26 @@
     </a:ext>
   </a:extLst>
 </a:theme>
+</file>
+
+<file path=ppt/webextensions/taskpanes.xml><?xml version="1.0" encoding="utf-8"?>
+<wetp:taskpanes xmlns:wetp="http://schemas.microsoft.com/office/webextensions/taskpanes/2010/11">
+  <wetp:taskpane dockstate="right" visibility="0" width="350" row="0">
+    <wetp:webextensionref xmlns:r="http://schemas.openxmlformats.org/officeDocument/2006/relationships" r:id="rId1"/>
+  </wetp:taskpane>
+</wetp:taskpanes>
+</file>
+
+<file path=ppt/webextensions/webextension1.xml><?xml version="1.0" encoding="utf-8"?>
+<we:webextension xmlns:we="http://schemas.microsoft.com/office/webextensions/webextension/2010/11" id="{B54CB8B9-ED0D-6E42-91EA-96A454884E37}">
+  <we:reference id="WA200010001" version="1.0.0.1" store="Omex" storeType="OMEX"/>
+  <we:alternateReferences>
+    <we:reference id="WA200010001" version="1.0.0.1" store="WA200010001" storeType="OMEX"/>
+  </we:alternateReferences>
+  <we:properties>
+    <we:property name="claude.fileId" value="&quot;eaf3436d-b2b6-4e93-97d6-0eac8f15f62d&quot;"/>
+  </we:properties>
+  <we:bindings/>
+  <we:snapshot xmlns:r="http://schemas.openxmlformats.org/officeDocument/2006/relationships"/>
+</we:webextension>
 </file>